--- a/docs/ERP-AI-L1参考架构-汇报版.pptx
+++ b/docs/ERP-AI-L1参考架构-汇报版.pptx
@@ -2820,7 +2820,7 @@
           <a:p>
             <a:r>
               <a:rPr lang="en-US" dirty="0"/>
-              <a:t>原则 1/2/3 合并回答。被问「你这不就是外挂」时，答案是共享器官加三口径对照。</a:t>
+              <a:t>原则 1/2/3 合并回答。被问「你这不就是外挂」时，答案是共享器官加三个入口对照。</a:t>
             </a:r>
             <a:endParaRPr lang="en-US" dirty="0"/>
           </a:p>
@@ -12115,7 +12115,7 @@
                 <a:ea typeface="Microsoft YaHei" pitchFamily="34" charset="-122"/>
                 <a:cs typeface="Microsoft YaHei" pitchFamily="34" charset="-120"/>
               </a:rPr>
-              <a:t>Agent 演进与治理对冲</a:t>
+              <a:t>Agent 演进与治理保险</a:t>
             </a:r>
             <a:endParaRPr lang="en-US" sz="2600" dirty="0"/>
           </a:p>
@@ -12514,7 +12514,7 @@
                 <a:ea typeface="Arial" pitchFamily="34" charset="-122"/>
                 <a:cs typeface="Arial" pitchFamily="34" charset="-120"/>
               </a:rPr>
-              <a:t>对冲怎么做的</a:t>
+              <a:t>保险怎么做的</a:t>
             </a:r>
             <a:endParaRPr lang="en-US" sz="1050" dirty="0"/>
           </a:p>
@@ -12661,7 +12661,7 @@
                 <a:ea typeface="Arial" pitchFamily="34" charset="-122"/>
                 <a:cs typeface="Arial" pitchFamily="34" charset="-120"/>
               </a:rPr>
-              <a:t>对冲的边界</a:t>
+              <a:t>保险的边界</a:t>
             </a:r>
             <a:endParaRPr lang="en-US" sz="1050" dirty="0"/>
           </a:p>
@@ -13783,7 +13783,7 @@
                 <a:ea typeface="Microsoft YaHei" pitchFamily="34" charset="-122"/>
                 <a:cs typeface="Microsoft YaHei" pitchFamily="34" charset="-120"/>
               </a:rPr>
-              <a:t>口径各答各的</a:t>
+              <a:t>定义各答各的</a:t>
             </a:r>
             <a:endParaRPr lang="en-US" sz="1050" dirty="0"/>
           </a:p>
@@ -15732,7 +15732,7 @@
                 <a:ea typeface="Microsoft YaHei" pitchFamily="34" charset="-122"/>
                 <a:cs typeface="Microsoft YaHei" pitchFamily="34" charset="-120"/>
               </a:rPr>
-              <a:t>版本四件套锚定</a:t>
+              <a:t>版本四件套锁定</a:t>
             </a:r>
             <a:endParaRPr lang="en-US" sz="1100" dirty="0"/>
           </a:p>
@@ -19039,7 +19039,7 @@
                 <a:ea typeface="Microsoft YaHei" pitchFamily="34" charset="-122"/>
                 <a:cs typeface="Microsoft YaHei" pitchFamily="34" charset="-120"/>
               </a:rPr>
-              <a:t>张力点、增补、缺口</a:t>
+              <a:t>冲突点、增补、缺口</a:t>
             </a:r>
             <a:endParaRPr lang="en-US" sz="1050" dirty="0"/>
           </a:p>
@@ -19452,7 +19452,7 @@
                 <a:ea typeface="Microsoft YaHei" pitchFamily="34" charset="-122"/>
                 <a:cs typeface="Microsoft YaHei" pitchFamily="34" charset="-120"/>
               </a:rPr>
-              <a:t>四个张力点里有两个跨部门，还有八条缺口的处置方向需要在架构层面定调。</a:t>
+              <a:t>四个冲突点里有两个跨部门，还有八条缺口的处置方向需要在架构层面定调。</a:t>
             </a:r>
             <a:endParaRPr lang="en-US" sz="1150" dirty="0"/>
           </a:p>
@@ -20736,7 +20736,7 @@
                 <a:ea typeface="Microsoft YaHei" pitchFamily="34" charset="-122"/>
                 <a:cs typeface="Microsoft YaHei" pitchFamily="34" charset="-120"/>
               </a:rPr>
-              <a:t>评测锚点、十一幕演示、检验体系</a:t>
+              <a:t>评测基准、十一幕演示、检验体系</a:t>
             </a:r>
             <a:endParaRPr lang="en-US" sz="1050" dirty="0"/>
           </a:p>
@@ -20944,7 +20944,7 @@
                 <a:ea typeface="Arial" pitchFamily="34" charset="-122"/>
                 <a:cs typeface="Arial" pitchFamily="34" charset="-120"/>
               </a:rPr>
-              <a:t>6  eval/cases/           评测锚点：正例加负例，绑定能力清单</a:t>
+              <a:t>6  eval/cases/           评测基准：正例加负例，绑定能力清单</a:t>
             </a:r>
             <a:endParaRPr lang="en-US" sz="950" dirty="0"/>
           </a:p>
@@ -21053,7 +21053,7 @@
                 <a:ea typeface="Microsoft YaHei" pitchFamily="34" charset="-122"/>
                 <a:cs typeface="Microsoft YaHei" pitchFamily="34" charset="-120"/>
               </a:rPr>
-              <a:t>开发纪律五条：场景图只 import hub.sdk（换框架只改一个 86 行的文件）；模型只按动作契约填空；行动部件不直连数据库；新场景必须带评测锚点含负例，50 条全绿才能发；单 Agent 工具数与上下文预算要有上限约定（本仓未定，缺口 G3）。</a:t>
+              <a:t>开发纪律五条：场景图只 import hub.sdk（换框架只改一个 86 行的文件）；模型只按动作契约填空；行动部件不直连数据库；新场景必须带评测基准含负例，50 条全绿才能发；单 Agent 工具数与上下文预算要有上限约定（本仓未定，缺口 G3）。</a:t>
             </a:r>
             <a:endParaRPr lang="en-US" sz="1250" dirty="0"/>
           </a:p>
@@ -22020,7 +22020,7 @@
                           <a:ea typeface="Microsoft YaHei" pitchFamily="34" charset="-122"/>
                           <a:cs typeface="Microsoft YaHei" pitchFamily="34" charset="-120"/>
                         </a:rPr>
-                        <a:t>@Transactional 与变更同事务落库；同业务键重放首次结果；语义化错误码供评测锚定。TaxCodeService + RuleEngine</a:t>
+                        <a:t>@Transactional 与变更同事务落库；同业务键重放首次结果；语义化错误码供评测断言。TaxCodeService + RuleEngine</a:t>
                       </a:r>
                       <a:endParaRPr lang="en-US" sz="1000" dirty="0">
                         <a:latin typeface="Microsoft YaHei" charset="0"/>
@@ -25418,7 +25418,7 @@
                           <a:ea typeface="Microsoft YaHei" pitchFamily="34" charset="-122"/>
                           <a:cs typeface="Microsoft YaHei" pitchFamily="34" charset="-120"/>
                         </a:rPr>
-                        <a:t>接受。当前协同阶段，已预埋治理对冲</a:t>
+                        <a:t>接受。当前协同阶段，已预埋治理保险</a:t>
                       </a:r>
                       <a:endParaRPr lang="en-US" sz="1000" dirty="0">
                         <a:latin typeface="Microsoft YaHei" charset="0"/>
@@ -26347,7 +26347,7 @@
                 <a:ea typeface="Microsoft YaHei" pitchFamily="34" charset="-122"/>
                 <a:cs typeface="Microsoft YaHei" pitchFamily="34" charset="-120"/>
               </a:rPr>
-              <a:t>主线第六步：14 条内部的四个张力点</a:t>
+              <a:t>主线第六步：14 条内部的四个冲突点</a:t>
             </a:r>
             <a:endParaRPr lang="en-US" sz="2600" dirty="0"/>
           </a:p>
@@ -26597,7 +26597,7 @@
                 <a:ea typeface="Microsoft YaHei" pitchFamily="34" charset="-122"/>
                 <a:cs typeface="Microsoft YaHei" pitchFamily="34" charset="-120"/>
               </a:rPr>
-              <a:t>Python 底座加 Java 存量，字面上像外挂。表态：内生等于共享权限、审计、幂等，不是进程同体。三口径对照是证据。</a:t>
+              <a:t>Python 底座加 Java 存量，字面上像外挂。表态：内生等于共享权限、审计、幂等，不是进程同体。三个入口对照是证据。</a:t>
             </a:r>
             <a:endParaRPr lang="en-US" sz="1150" dirty="0"/>
           </a:p>
@@ -26941,7 +26941,7 @@
                 <a:ea typeface="Microsoft YaHei" pitchFamily="34" charset="-122"/>
                 <a:cs typeface="Microsoft YaHei" pitchFamily="34" charset="-120"/>
               </a:rPr>
-              <a:t>替换之后谁做确定性执行。表态：治理面在网关与合同层不在 Java，执行端履行同一份 BO 合同即可。对冲只覆盖管控面，业务规则要跟着迁移。</a:t>
+              <a:t>替换之后谁做确定性执行。表态：治理面在网关与合同层不在 Java，执行端履行同一份 BO 合同即可。保险只覆盖管控面，业务规则要跟着迁移。</a:t>
             </a:r>
             <a:endParaRPr lang="en-US" sz="1150" dirty="0"/>
           </a:p>
@@ -27245,7 +27245,7 @@
                 <a:ea typeface="Microsoft YaHei" pitchFamily="34" charset="-122"/>
                 <a:cs typeface="Microsoft YaHei" pitchFamily="34" charset="-120"/>
               </a:rPr>
-              <a:t>张力 D 展开：探索面不能变成第二套权限体系</a:t>
+              <a:t>冲突点 D 展开：探索面不能变成第二套权限体系</a:t>
             </a:r>
             <a:endParaRPr lang="en-US" sz="2600" dirty="0"/>
           </a:p>
@@ -28328,7 +28328,7 @@
                 <a:ea typeface="Microsoft YaHei" pitchFamily="34" charset="-122"/>
                 <a:cs typeface="Microsoft YaHei" pitchFamily="34" charset="-120"/>
               </a:rPr>
-              <a:t>50 条锚点评测分六类，幻觉与诱导是两个专门的负向类。能力清单与评测用例同源绑定。护栏本身也在评测范围内。没有评测锚点的新场景不允许发布。</a:t>
+              <a:t>50 条基准评测分六类，幻觉与诱导是两个专门的负向类。能力清单与评测用例同源绑定。护栏本身也在评测范围内。没有评测基准的新场景不允许发布。</a:t>
             </a:r>
             <a:endParaRPr lang="en-US" sz="1050" dirty="0"/>
           </a:p>
@@ -28433,7 +28433,7 @@
                 <a:ea typeface="Microsoft YaHei" pitchFamily="34" charset="-122"/>
                 <a:cs typeface="Microsoft YaHei" pitchFamily="34" charset="-120"/>
               </a:rPr>
-              <a:t>口径互证是治理基础设施</a:t>
+              <a:t>自动对账是治理基础设施</a:t>
             </a:r>
             <a:endParaRPr lang="en-US" sz="1250" dirty="0"/>
           </a:p>
@@ -28475,7 +28475,7 @@
                 <a:ea typeface="Microsoft YaHei" pitchFamily="34" charset="-122"/>
                 <a:cs typeface="Microsoft YaHei" pitchFamily="34" charset="-120"/>
               </a:rPr>
-              <a:t>三口径权限对照、成本台账与审计对账、四问自检，都是可以重复跑的脚本。监督者这个角色靠数据设施成立，不靠责任心。</a:t>
+              <a:t>三个入口的权限对照、成本台账与审计对账、四问自检，都是可以重复跑的脚本。监督者这个角色靠数据设施成立，不靠责任心。</a:t>
             </a:r>
             <a:endParaRPr lang="en-US" sz="1050" dirty="0"/>
           </a:p>
@@ -28916,7 +28916,7 @@
                 <a:ea typeface="Microsoft YaHei" pitchFamily="34" charset="-122"/>
                 <a:cs typeface="Microsoft YaHei" pitchFamily="34" charset="-120"/>
               </a:rPr>
-              <a:t>骨架一次建好，血肉按场景长，每寸口径层资产都带评测锚。一次建全的问题是没有消费就没有验证，而且建成之前一直在腐烂。</a:t>
+              <a:t>骨架一次建好，血肉按场景长，每寸定义层资产都带评测基准。一次建全的问题是没有消费就没有验证，而且建成之前一直在腐烂。</a:t>
             </a:r>
             <a:endParaRPr lang="en-US" sz="1050" dirty="0"/>
           </a:p>
@@ -29969,7 +29969,7 @@
                           <a:ea typeface="Microsoft YaHei" pitchFamily="34" charset="-122"/>
                           <a:cs typeface="Microsoft YaHei" pitchFamily="34" charset="-120"/>
                         </a:rPr>
-                        <a:t>版本锚点缺模型与提示词</a:t>
+                        <a:t>版本标识缺模型与提示词</a:t>
                       </a:r>
                       <a:endParaRPr lang="en-US" sz="950" dirty="0">
                         <a:latin typeface="Microsoft YaHei" charset="0"/>
@@ -31749,7 +31749,7 @@
                           <a:ea typeface="Microsoft YaHei" pitchFamily="34" charset="-122"/>
                           <a:cs typeface="Microsoft YaHei" pitchFamily="34" charset="-120"/>
                         </a:rPr>
-                        <a:t>三选一：机对机专用加网络策略、网关统一收口、按计划下线</a:t>
+                        <a:t>三选一：机对机专用加网络策略、统一由网关接管、按计划下线</a:t>
                       </a:r>
                       <a:endParaRPr lang="en-US" sz="950" dirty="0">
                         <a:latin typeface="Microsoft YaHei" charset="0"/>
@@ -33257,7 +33257,7 @@
                 <a:ea typeface="Microsoft YaHei" pitchFamily="34" charset="-122"/>
                 <a:cs typeface="Microsoft YaHei" pitchFamily="34" charset="-120"/>
               </a:rPr>
-              <a:t>隔离、口径、成本对账</a:t>
+              <a:t>隔离、定义、成本对账</a:t>
             </a:r>
             <a:endParaRPr lang="en-US" sz="1000" dirty="0"/>
           </a:p>
@@ -33776,7 +33776,7 @@
                 <a:ea typeface="Microsoft YaHei" pitchFamily="34" charset="-122"/>
                 <a:cs typeface="Microsoft YaHei" pitchFamily="34" charset="-120"/>
               </a:rPr>
-              <a:t>页面约 50 条 / Open API 5054 / BO API 同页面口径并披露过滤维度</a:t>
+              <a:t>页面约 50 条 / Open API 5054 / BO API 与页面一致并披露过滤维度</a:t>
             </a:r>
             <a:endParaRPr lang="en-US" sz="1000" dirty="0"/>
           </a:p>
@@ -34148,7 +34148,7 @@
                 <a:ea typeface="Microsoft YaHei" pitchFamily="34" charset="-122"/>
                 <a:cs typeface="Microsoft YaHei" pitchFamily="34" charset="-120"/>
               </a:rPr>
-              <a:t>阈值、术语、口径互不泄露，数据互相看不见</a:t>
+              <a:t>阈值、术语、定义互不泄露，数据互相看不见</a:t>
             </a:r>
             <a:endParaRPr lang="en-US" sz="1000" dirty="0"/>
           </a:p>
@@ -34952,7 +34952,7 @@
                 <a:ea typeface="Microsoft YaHei" pitchFamily="34" charset="-122"/>
                 <a:cs typeface="Microsoft YaHei" pitchFamily="34" charset="-120"/>
               </a:rPr>
-              <a:t>事件目录 · 权限维度模型 · SoD 与协作清单 · 语义口径仲裁 · 规格扩展标准 · 评测锚点规范 · 审批分级</a:t>
+              <a:t>事件目录 · 权限维度模型 · SoD 与协作清单 · 语义定义仲裁 · 规格扩展标准 · 评测基准规范 · 审批分级</a:t>
             </a:r>
             <a:endParaRPr lang="en-US" sz="1250" dirty="0"/>
           </a:p>
@@ -34991,7 +34991,7 @@
                 <a:ea typeface="Microsoft YaHei" pitchFamily="34" charset="-122"/>
                 <a:cs typeface="Microsoft YaHei" pitchFamily="34" charset="-120"/>
               </a:rPr>
-              <a:t>一旦某个产品私设，跨域协同和口径一致性就断了</a:t>
+              <a:t>一旦某个产品私设，跨域协同和定义一致性就断了</a:t>
             </a:r>
             <a:endParaRPr lang="en-US" sz="1100" dirty="0"/>
           </a:p>
@@ -35819,7 +35819,7 @@
                 <a:ea typeface="Microsoft YaHei" pitchFamily="34" charset="-122"/>
                 <a:cs typeface="Microsoft YaHei" pitchFamily="34" charset="-120"/>
               </a:rPr>
-              <a:t>同页面口径</a:t>
+              <a:t>与页面一致</a:t>
             </a:r>
             <a:endParaRPr lang="en-US" sz="3000" dirty="0"/>
           </a:p>
@@ -36001,7 +36001,7 @@
                 <a:ea typeface="Microsoft YaHei" pitchFamily="34" charset="-122"/>
                 <a:cs typeface="Microsoft YaHei" pitchFamily="34" charset="-120"/>
               </a:rPr>
-              <a:t>这个事故在演示系统里可以当场复现，也已经修复：scene_1 三口径对照。</a:t>
+              <a:t>这个事故在演示系统里可以当场复现，也已经修复：scene_1 三个入口对照。</a:t>
             </a:r>
             <a:endParaRPr lang="en-US" sz="1350" dirty="0"/>
           </a:p>
@@ -36768,7 +36768,7 @@
                 <a:ea typeface="Microsoft YaHei" pitchFamily="34" charset="-122"/>
                 <a:cs typeface="Microsoft YaHei" pitchFamily="34" charset="-120"/>
               </a:rPr>
-              <a:t>标为机对机专用加网络策略、网关统一收口、还是按计划下线。不处置的话，原则 1 和 3 在实际系统里始终有个缺口。</a:t>
+              <a:t>标为机对机专用加网络策略、统一由网关接管、还是按计划下线。不处置的话，原则 1 和 3 在实际系统里始终有个缺口。</a:t>
             </a:r>
             <a:endParaRPr lang="en-US" sz="1150" dirty="0"/>
           </a:p>
@@ -37356,7 +37356,7 @@
                 <a:ea typeface="Microsoft YaHei" pitchFamily="34" charset="-122"/>
                 <a:cs typeface="Microsoft YaHei" pitchFamily="34" charset="-120"/>
               </a:rPr>
-              <a:t>每项配可运行的示例代码与验证脚本：BO 规格、权限判定组件、业务幂等、完整性披露、事件发布、元数据接口、MCP 暴露、派生字段引擎；以及事件目录、权限维度、SoD 与协作清单、口径仲裁、规格扩展标准、评测锚点绑定、审批分级。</a:t>
+              <a:t>每项配可运行的示例代码与验证脚本：BO 规格、权限判定组件、业务幂等、完整性披露、事件发布、元数据接口、MCP 暴露、派生字段引擎；以及事件目录、权限维度、SoD 与协作清单、定义仲裁、规格扩展标准、评测基准绑定、审批分级。</a:t>
             </a:r>
             <a:endParaRPr lang="en-US" sz="1050" dirty="0"/>
           </a:p>
@@ -37506,7 +37506,7 @@
                 <a:ea typeface="Microsoft YaHei" pitchFamily="34" charset="-122"/>
                 <a:cs typeface="Microsoft YaHei" pitchFamily="34" charset="-120"/>
               </a:rPr>
-              <a:t>用库存把八个工作项推演一遍，说明结构可复用，变的是幂等粒度、规模应对、不可逆判定口径三处。</a:t>
+              <a:t>用库存把八个工作项推演一遍，说明结构可复用，变的是幂等粒度、规模应对、不可逆判定标准三处。</a:t>
             </a:r>
             <a:endParaRPr lang="en-US" sz="1050" dirty="0"/>
           </a:p>
@@ -37656,7 +37656,7 @@
                 <a:ea typeface="Microsoft YaHei" pitchFamily="34" charset="-122"/>
                 <a:cs typeface="Microsoft YaHei" pitchFamily="34" charset="-120"/>
               </a:rPr>
-              <a:t>每幕的讲解词、断言要点、浏览器路径与 45 分钟节奏；四体系结果与三口径取证，随代码再生成。</a:t>
+              <a:t>每幕的讲解词、断言要点、浏览器路径与 45 分钟节奏；四体系结果与三个入口取证，随代码再生成。</a:t>
             </a:r>
             <a:endParaRPr lang="en-US" sz="1050" dirty="0"/>
           </a:p>
@@ -38141,7 +38141,7 @@
                 <a:ea typeface="Microsoft YaHei" pitchFamily="34" charset="-122"/>
                 <a:cs typeface="Microsoft YaHei" pitchFamily="34" charset="-120"/>
               </a:rPr>
-              <a:t>数据权限口径不一致</a:t>
+              <a:t>数据权限标准不一致</a:t>
             </a:r>
             <a:endParaRPr lang="en-US" sz="1550" dirty="0"/>
           </a:p>
@@ -39512,7 +39512,7 @@
                 <a:ea typeface="Microsoft YaHei" pitchFamily="34" charset="-122"/>
                 <a:cs typeface="Microsoft YaHei" pitchFamily="34" charset="-120"/>
               </a:rPr>
-              <a:t>BO API 与页面走同一个 PermissionService，AI 侧零权限计算；审计五要素贯穿四个服务；写路径幂等在 Java 不在网关。一致性由 PermissionParityTest 守护，三口径对照是可现场重放的证据。</a:t>
+              <a:t>BO API 与页面走同一个 PermissionService，AI 侧零权限计算；审计五要素贯穿四个服务；写路径幂等在 Java 不在网关。一致性由 PermissionParityTest 守护，三个入口对照是可现场重放的证据。</a:t>
             </a:r>
             <a:endParaRPr lang="en-US" sz="1150" dirty="0"/>
           </a:p>
@@ -40493,7 +40493,7 @@
                 <a:ea typeface="Microsoft YaHei" pitchFamily="34" charset="-122"/>
                 <a:cs typeface="Microsoft YaHei" pitchFamily="34" charset="-120"/>
               </a:rPr>
-              <a:t>人从执行者变成确认者、例外处理者、监督者；治理放在网关与合同层，为终局替换预埋对冲。</a:t>
+              <a:t>人从执行者变成确认者、例外处理者、监督者；治理放在网关与合同层，为终局替换预埋保险。</a:t>
             </a:r>
             <a:endParaRPr lang="en-US" sz="1200" dirty="0"/>
           </a:p>
@@ -41313,7 +41313,7 @@
                 <a:ea typeface="Microsoft YaHei" pitchFamily="34" charset="-122"/>
                 <a:cs typeface="Microsoft YaHei" pitchFamily="34" charset="-120"/>
               </a:rPr>
-              <a:t>一处定义、处处引用，否则每个 Agent 各念各的经。模型不知道「进货单」在这家租户指采购订单还是收货单，不知道「大额风险」按哪个阈值算，口径必然漂移。语义文件三段式加三层叠加解析已经做到这一点。</a:t>
+              <a:t>一处定义、处处引用，否则每个 Agent 各念各的经。模型不知道「进货单」在这家租户指采购订单还是收货单，不知道「大额风险」按哪个阈值算，定义必然漂移。语义文件三段式加三层叠加解析已经做到这一点。</a:t>
             </a:r>
             <a:endParaRPr lang="en-US" sz="1150" dirty="0"/>
           </a:p>
@@ -42288,7 +42288,7 @@
                 <a:ea typeface="Microsoft YaHei" pitchFamily="34" charset="-122"/>
                 <a:cs typeface="Microsoft YaHei" pitchFamily="34" charset="-120"/>
               </a:rPr>
-              <a:t>术语口径（进货单在这家指什么）、指标阈值、派生字段计算式、对象关系，这些是业务约定，机器推不出来，由人写在增量段。能自动生成的绝不手抄。</a:t>
+              <a:t>术语定义（进货单在这家指什么）、指标阈值、派生字段计算式、对象关系，这些是业务约定，机器推不出来，由人写在增量段。能自动生成的绝不手抄。</a:t>
             </a:r>
             <a:endParaRPr lang="en-US" sz="1150" dirty="0"/>
           </a:p>
@@ -43332,7 +43332,7 @@
                 <a:ea typeface="Microsoft YaHei" pitchFamily="34" charset="-122"/>
                 <a:cs typeface="Microsoft YaHei" pitchFamily="34" charset="-120"/>
               </a:rPr>
-              <a:t>验证：scene_1 三口径对照（页面约 50 / Open API 5054 / BO API 同页面口径并披露过滤维度）；PermissionParityTest；scene_2 完整性披露。</a:t>
+              <a:t>验证：scene_1 三个入口对照（页面约 50 / Open API 5054 / BO API 与页面一致并披露过滤维度）；PermissionParityTest；scene_2 完整性披露。</a:t>
             </a:r>
             <a:endParaRPr lang="en-US" sz="1250" dirty="0"/>
           </a:p>
